--- a/ゲーム科3年/00_前期/ゲームエンジンⅤ/04_Actor作成.pptx
+++ b/ゲーム科3年/00_前期/ゲームエンジンⅤ/04_Actor作成.pptx
@@ -282,7 +282,7 @@
           <a:p>
             <a:fld id="{E9CC885B-4903-4D54-9A93-00025F12DED9}" type="datetimeFigureOut">
               <a:rPr kumimoji="1" lang="ja-JP" altLang="en-US" smtClean="0"/>
-              <a:t>2025/2/19</a:t>
+              <a:t>2025/3/13</a:t>
             </a:fld>
             <a:endParaRPr kumimoji="1" lang="ja-JP" altLang="en-US"/>
           </a:p>
@@ -512,7 +512,7 @@
           <a:p>
             <a:fld id="{E9CC885B-4903-4D54-9A93-00025F12DED9}" type="datetimeFigureOut">
               <a:rPr kumimoji="1" lang="ja-JP" altLang="en-US" smtClean="0"/>
-              <a:t>2025/2/19</a:t>
+              <a:t>2025/3/13</a:t>
             </a:fld>
             <a:endParaRPr kumimoji="1" lang="ja-JP" altLang="en-US"/>
           </a:p>
@@ -752,7 +752,7 @@
           <a:p>
             <a:fld id="{E9CC885B-4903-4D54-9A93-00025F12DED9}" type="datetimeFigureOut">
               <a:rPr kumimoji="1" lang="ja-JP" altLang="en-US" smtClean="0"/>
-              <a:t>2025/2/19</a:t>
+              <a:t>2025/3/13</a:t>
             </a:fld>
             <a:endParaRPr kumimoji="1" lang="ja-JP" altLang="en-US"/>
           </a:p>
@@ -982,7 +982,7 @@
           <a:p>
             <a:fld id="{E9CC885B-4903-4D54-9A93-00025F12DED9}" type="datetimeFigureOut">
               <a:rPr kumimoji="1" lang="ja-JP" altLang="en-US" smtClean="0"/>
-              <a:t>2025/2/19</a:t>
+              <a:t>2025/3/13</a:t>
             </a:fld>
             <a:endParaRPr kumimoji="1" lang="ja-JP" altLang="en-US"/>
           </a:p>
@@ -1257,7 +1257,7 @@
           <a:p>
             <a:fld id="{E9CC885B-4903-4D54-9A93-00025F12DED9}" type="datetimeFigureOut">
               <a:rPr kumimoji="1" lang="ja-JP" altLang="en-US" smtClean="0"/>
-              <a:t>2025/2/19</a:t>
+              <a:t>2025/3/13</a:t>
             </a:fld>
             <a:endParaRPr kumimoji="1" lang="ja-JP" altLang="en-US"/>
           </a:p>
@@ -1586,7 +1586,7 @@
           <a:p>
             <a:fld id="{E9CC885B-4903-4D54-9A93-00025F12DED9}" type="datetimeFigureOut">
               <a:rPr kumimoji="1" lang="ja-JP" altLang="en-US" smtClean="0"/>
-              <a:t>2025/2/19</a:t>
+              <a:t>2025/3/13</a:t>
             </a:fld>
             <a:endParaRPr kumimoji="1" lang="ja-JP" altLang="en-US"/>
           </a:p>
@@ -2062,7 +2062,7 @@
           <a:p>
             <a:fld id="{E9CC885B-4903-4D54-9A93-00025F12DED9}" type="datetimeFigureOut">
               <a:rPr kumimoji="1" lang="ja-JP" altLang="en-US" smtClean="0"/>
-              <a:t>2025/2/19</a:t>
+              <a:t>2025/3/13</a:t>
             </a:fld>
             <a:endParaRPr kumimoji="1" lang="ja-JP" altLang="en-US"/>
           </a:p>
@@ -2203,7 +2203,7 @@
           <a:p>
             <a:fld id="{E9CC885B-4903-4D54-9A93-00025F12DED9}" type="datetimeFigureOut">
               <a:rPr kumimoji="1" lang="ja-JP" altLang="en-US" smtClean="0"/>
-              <a:t>2025/2/19</a:t>
+              <a:t>2025/3/13</a:t>
             </a:fld>
             <a:endParaRPr kumimoji="1" lang="ja-JP" altLang="en-US"/>
           </a:p>
@@ -2316,7 +2316,7 @@
           <a:p>
             <a:fld id="{E9CC885B-4903-4D54-9A93-00025F12DED9}" type="datetimeFigureOut">
               <a:rPr kumimoji="1" lang="ja-JP" altLang="en-US" smtClean="0"/>
-              <a:t>2025/2/19</a:t>
+              <a:t>2025/3/13</a:t>
             </a:fld>
             <a:endParaRPr kumimoji="1" lang="ja-JP" altLang="en-US"/>
           </a:p>
@@ -2659,7 +2659,7 @@
           <a:p>
             <a:fld id="{E9CC885B-4903-4D54-9A93-00025F12DED9}" type="datetimeFigureOut">
               <a:rPr kumimoji="1" lang="ja-JP" altLang="en-US" smtClean="0"/>
-              <a:t>2025/2/19</a:t>
+              <a:t>2025/3/13</a:t>
             </a:fld>
             <a:endParaRPr kumimoji="1" lang="ja-JP" altLang="en-US"/>
           </a:p>
@@ -2947,7 +2947,7 @@
           <a:p>
             <a:fld id="{E9CC885B-4903-4D54-9A93-00025F12DED9}" type="datetimeFigureOut">
               <a:rPr kumimoji="1" lang="ja-JP" altLang="en-US" smtClean="0"/>
-              <a:t>2025/2/19</a:t>
+              <a:t>2025/3/13</a:t>
             </a:fld>
             <a:endParaRPr kumimoji="1" lang="ja-JP" altLang="en-US"/>
           </a:p>
@@ -3220,7 +3220,7 @@
           <a:p>
             <a:fld id="{E9CC885B-4903-4D54-9A93-00025F12DED9}" type="datetimeFigureOut">
               <a:rPr kumimoji="1" lang="ja-JP" altLang="en-US" smtClean="0"/>
-              <a:t>2025/2/19</a:t>
+              <a:t>2025/3/13</a:t>
             </a:fld>
             <a:endParaRPr kumimoji="1" lang="ja-JP" altLang="en-US"/>
           </a:p>
@@ -7616,7 +7616,7 @@
         <p:spPr>
           <a:xfrm>
             <a:off x="567542" y="1216429"/>
-            <a:ext cx="8494633" cy="3785652"/>
+            <a:ext cx="8494633" cy="4154984"/>
           </a:xfrm>
           <a:prstGeom prst="rect">
             <a:avLst/>
@@ -7756,6 +7756,13 @@
             <a:r>
               <a:rPr kumimoji="1" lang="ja-JP" altLang="en-US" sz="2400" dirty="0"/>
               <a:t>で動作するオブジェクト</a:t>
+            </a:r>
+            <a:endParaRPr kumimoji="1" lang="en-US" altLang="ja-JP" sz="2400" dirty="0"/>
+          </a:p>
+          <a:p>
+            <a:r>
+              <a:rPr kumimoji="1" lang="ja-JP" altLang="en-US" sz="2400"/>
+              <a:t>敵やギミックなどはこれ</a:t>
             </a:r>
             <a:endParaRPr kumimoji="1" lang="en-US" altLang="ja-JP" sz="2400" dirty="0"/>
           </a:p>
